--- a/liveries/nasa-jsc-eg/template.pptx
+++ b/liveries/nasa-jsc-eg/template.pptx
@@ -3282,8 +3282,8 @@
     <a:custClr name="Data 2 · Red">
       <a:srgbClr val="EF483F"/>
     </a:custClr>
-    <a:custClr name="Data 3 · Orange">
-      <a:srgbClr val="F29D49"/>
+    <a:custClr name="Data 3 · Yellow">
+      <a:srgbClr val="FCDB00"/>
     </a:custClr>
     <a:custClr name="Data 4 · Slate">
       <a:srgbClr val="487682"/>

--- a/liveries/nasa-jsc-eg/template.pptx
+++ b/liveries/nasa-jsc-eg/template.pptx
@@ -421,7 +421,7 @@
           </a:prstGeom>
         </p:spPr>
         <p:txBody>
-          <a:bodyPr vert="horz" lIns="0" tIns="0" rIns="0" bIns="0" anchor="b">
+          <a:bodyPr vert="horz" lIns="0" tIns="0" rIns="0" bIns="0" anchor="t">
             <a:normAutofit/>
           </a:bodyPr>
           <a:lstStyle>
@@ -2133,7 +2133,7 @@
           </a:prstGeom>
         </p:spPr>
         <p:txBody>
-          <a:bodyPr vert="horz" lIns="0" tIns="0" rIns="0" bIns="0" anchor="b">
+          <a:bodyPr vert="horz" lIns="0" tIns="0" rIns="0" bIns="0" anchor="t">
             <a:normAutofit/>
           </a:bodyPr>
           <a:lstStyle>

--- a/liveries/nasa-jsc-eg/template.pptx
+++ b/liveries/nasa-jsc-eg/template.pptx
@@ -124,7 +124,7 @@
         </p:nvSpPr>
         <p:spPr>
           <a:xfrm>
-            <a:off x="475488" y="2777490"/>
+            <a:off x="475488" y="2948940"/>
             <a:ext cx="9387840" cy="274320"/>
           </a:xfrm>
           <a:prstGeom prst="rect">
@@ -141,7 +141,7 @@
                 <a:spcPts val="0"/>
               </a:spcBef>
               <a:buNone/>
-              <a:defRPr sz="1200" b="1" cap="all">
+              <a:defRPr sz="1600" b="1" cap="all">
                 <a:solidFill>
                   <a:srgbClr val="000000"/>
                 </a:solidFill>
@@ -169,7 +169,7 @@
         </p:nvSpPr>
         <p:spPr>
           <a:xfrm>
-            <a:off x="475488" y="2554605"/>
+            <a:off x="475488" y="2606040"/>
             <a:ext cx="9387840" cy="960120"/>
           </a:xfrm>
           <a:prstGeom prst="rect">
@@ -214,8 +214,8 @@
         </p:nvSpPr>
         <p:spPr>
           <a:xfrm>
-            <a:off x="475488" y="3754755"/>
-            <a:ext cx="9387840" cy="565785"/>
+            <a:off x="475488" y="3806190"/>
+            <a:ext cx="9387840" cy="445770"/>
           </a:xfrm>
           <a:prstGeom prst="rect">
             <a:avLst/>
@@ -231,7 +231,7 @@
                 <a:spcPts val="0"/>
               </a:spcBef>
               <a:buNone/>
-              <a:defRPr sz="1800" b="0">
+              <a:defRPr sz="2000" b="0">
                 <a:solidFill>
                   <a:srgbClr val="000000"/>
                 </a:solidFill>
@@ -425,7 +425,7 @@
             <a:normAutofit/>
           </a:bodyPr>
           <a:lstStyle>
-            <a:lvl1pPr algn="l">
+            <a:lvl1pPr algn="ctr">
               <a:lnSpc>
                 <a:spcPct val="90000"/>
               </a:lnSpc>
@@ -469,21 +469,21 @@
             <a:normAutofit/>
           </a:bodyPr>
           <a:lstStyle>
-            <a:lvl1pPr>
+            <a:lvl1pPr algn="ctr" marL="0" indent="0">
               <a:defRPr sz="1600">
                 <a:solidFill>
                   <a:srgbClr val="FFFFFF"/>
                 </a:solidFill>
               </a:defRPr>
             </a:lvl1pPr>
-            <a:lvl2pPr>
+            <a:lvl2pPr algn="ctr" marL="0" indent="0">
               <a:defRPr sz="1500">
                 <a:solidFill>
                   <a:srgbClr val="FFFFFF"/>
                 </a:solidFill>
               </a:defRPr>
             </a:lvl2pPr>
-            <a:lvl3pPr>
+            <a:lvl3pPr algn="ctr" marL="0" indent="0">
               <a:defRPr sz="1300">
                 <a:solidFill>
                   <a:srgbClr val="FFFFFF"/>
@@ -931,7 +931,7 @@
             <a:normAutofit/>
           </a:bodyPr>
           <a:lstStyle>
-            <a:lvl1pPr algn="l">
+            <a:lvl1pPr algn="ctr">
               <a:lnSpc>
                 <a:spcPct val="90000"/>
               </a:lnSpc>
@@ -975,7 +975,7 @@
             <a:normAutofit/>
           </a:bodyPr>
           <a:lstStyle>
-            <a:lvl1pPr algn="l" marL="0" indent="0">
+            <a:lvl1pPr algn="ctr" marL="0" indent="0">
               <a:spcBef>
                 <a:spcPts val="0"/>
               </a:spcBef>
@@ -2137,7 +2137,7 @@
             <a:normAutofit/>
           </a:bodyPr>
           <a:lstStyle>
-            <a:lvl1pPr algn="l">
+            <a:lvl1pPr algn="ctr">
               <a:lnSpc>
                 <a:spcPct val="90000"/>
               </a:lnSpc>
@@ -2181,21 +2181,21 @@
             <a:normAutofit/>
           </a:bodyPr>
           <a:lstStyle>
-            <a:lvl1pPr>
+            <a:lvl1pPr algn="ctr" marL="0" indent="0">
               <a:defRPr sz="1600">
                 <a:solidFill>
                   <a:srgbClr val="FFFFFF"/>
                 </a:solidFill>
               </a:defRPr>
             </a:lvl1pPr>
-            <a:lvl2pPr>
+            <a:lvl2pPr algn="ctr" marL="0" indent="0">
               <a:defRPr sz="1500">
                 <a:solidFill>
                   <a:srgbClr val="FFFFFF"/>
                 </a:solidFill>
               </a:defRPr>
             </a:lvl2pPr>
-            <a:lvl3pPr>
+            <a:lvl3pPr algn="ctr" marL="0" indent="0">
               <a:defRPr sz="1300">
                 <a:solidFill>
                   <a:srgbClr val="FFFFFF"/>
@@ -2415,7 +2415,7 @@
         </p:nvSpPr>
         <p:spPr>
           <a:xfrm>
-            <a:off x="475488" y="2777490"/>
+            <a:off x="475488" y="2948940"/>
             <a:ext cx="9387840" cy="274320"/>
           </a:xfrm>
           <a:prstGeom prst="rect">
@@ -2432,7 +2432,7 @@
                 <a:spcPts val="0"/>
               </a:spcBef>
               <a:buNone/>
-              <a:defRPr sz="1200" b="1" cap="all">
+              <a:defRPr sz="1600" b="1" cap="all">
                 <a:solidFill>
                   <a:srgbClr val="FFFFFF"/>
                 </a:solidFill>
@@ -2460,7 +2460,7 @@
         </p:nvSpPr>
         <p:spPr>
           <a:xfrm>
-            <a:off x="475488" y="2554605"/>
+            <a:off x="475488" y="2606040"/>
             <a:ext cx="9387840" cy="960120"/>
           </a:xfrm>
           <a:prstGeom prst="rect">
@@ -2505,8 +2505,8 @@
         </p:nvSpPr>
         <p:spPr>
           <a:xfrm>
-            <a:off x="475488" y="3754755"/>
-            <a:ext cx="9387840" cy="565785"/>
+            <a:off x="475488" y="3806190"/>
+            <a:ext cx="9387840" cy="445770"/>
           </a:xfrm>
           <a:prstGeom prst="rect">
             <a:avLst/>
@@ -2522,7 +2522,7 @@
                 <a:spcPts val="0"/>
               </a:spcBef>
               <a:buNone/>
-              <a:defRPr sz="1800" b="0">
+              <a:defRPr sz="2000" b="0">
                 <a:solidFill>
                   <a:srgbClr val="FFFFFF"/>
                 </a:solidFill>

--- a/liveries/nasa-jsc-eg/template.pptx
+++ b/liveries/nasa-jsc-eg/template.pptx
@@ -2952,8 +2952,11 @@
         <a:spcBef>
           <a:spcPts val="800"/>
         </a:spcBef>
+        <a:buClr>
+          <a:srgbClr val="FFFFFF"/>
+        </a:buClr>
         <a:buFont typeface="Arial"/>
-        <a:buChar char="•"/>
+        <a:buChar char="▪"/>
         <a:defRPr sz="1600" kern="1200">
           <a:solidFill>
             <a:schemeClr val="tx1"/>
@@ -2970,8 +2973,11 @@
         <a:spcBef>
           <a:spcPts val="480"/>
         </a:spcBef>
-        <a:buFont typeface="Wingdings"/>
-        <a:buChar char="§"/>
+        <a:buClr>
+          <a:srgbClr val="FFFFFF"/>
+        </a:buClr>
+        <a:buFont typeface="Arial"/>
+        <a:buChar char="–"/>
         <a:defRPr sz="1500" kern="1200">
           <a:solidFill>
             <a:schemeClr val="tx1"/>
@@ -2988,8 +2994,11 @@
         <a:spcBef>
           <a:spcPts val="480"/>
         </a:spcBef>
-        <a:buFont typeface="Courier New"/>
-        <a:buChar char="o"/>
+        <a:buClr>
+          <a:srgbClr val="FFFFFF"/>
+        </a:buClr>
+        <a:buFont typeface="Arial"/>
+        <a:buChar char="•"/>
         <a:defRPr sz="1300" kern="1200">
           <a:solidFill>
             <a:schemeClr val="tx1"/>
@@ -3006,8 +3015,11 @@
         <a:spcBef>
           <a:spcPts val="480"/>
         </a:spcBef>
+        <a:buClr>
+          <a:srgbClr val="FFFFFF"/>
+        </a:buClr>
         <a:buFont typeface="Arial"/>
-        <a:buChar char="–"/>
+        <a:buChar char="•"/>
         <a:defRPr sz="1200" kern="1200">
           <a:solidFill>
             <a:schemeClr val="tx1"/>
@@ -3024,8 +3036,11 @@
         <a:spcBef>
           <a:spcPts val="480"/>
         </a:spcBef>
+        <a:buClr>
+          <a:srgbClr val="FFFFFF"/>
+        </a:buClr>
         <a:buFont typeface="Arial"/>
-        <a:buChar char="»"/>
+        <a:buChar char="•"/>
         <a:defRPr sz="1100" kern="1200">
           <a:solidFill>
             <a:schemeClr val="tx1"/>

--- a/liveries/nasa-jsc-eg/template.pptx
+++ b/liveries/nasa-jsc-eg/template.pptx
@@ -816,7 +816,7 @@
     <p:bg>
       <p:bgPr>
         <a:solidFill>
-          <a:schemeClr val="bg2"/>
+          <a:schemeClr val="accent3"/>
         </a:solidFill>
         <a:effectLst/>
       </p:bgPr>
@@ -861,7 +861,7 @@
       </p:pic>
       <p:pic>
         <p:nvPicPr>
-          <p:cNvPr id="12" name="Logo (surface)"/>
+          <p:cNvPr id="12" name="Logo (dark)"/>
           <p:cNvPicPr>
             <a:picLocks noChangeAspect="1"/>
           </p:cNvPicPr>
@@ -885,7 +885,7 @@
       </p:pic>
       <p:pic>
         <p:nvPicPr>
-          <p:cNvPr id="13" name="Sign-off (surface)"/>
+          <p:cNvPr id="13" name="Sign-off (dark)"/>
           <p:cNvPicPr>
             <a:picLocks noChangeAspect="1"/>
           </p:cNvPicPr>
@@ -2022,7 +2022,7 @@
     <p:bg>
       <p:bgPr>
         <a:solidFill>
-          <a:schemeClr val="bg2"/>
+          <a:schemeClr val="accent3"/>
         </a:solidFill>
         <a:effectLst/>
       </p:bgPr>
@@ -2067,7 +2067,7 @@
       </p:pic>
       <p:pic>
         <p:nvPicPr>
-          <p:cNvPr id="12" name="Logo (surface)"/>
+          <p:cNvPr id="12" name="Logo (dark)"/>
           <p:cNvPicPr>
             <a:picLocks noChangeAspect="1"/>
           </p:cNvPicPr>
@@ -2091,7 +2091,7 @@
       </p:pic>
       <p:pic>
         <p:nvPicPr>
-          <p:cNvPr id="13" name="Sign-off (surface)"/>
+          <p:cNvPr id="13" name="Sign-off (dark)"/>
           <p:cNvPicPr>
             <a:picLocks noChangeAspect="1"/>
           </p:cNvPicPr>

--- a/liveries/nasa-jsc-eg/template.pptx
+++ b/liveries/nasa-jsc-eg/template.pptx
@@ -2357,7 +2357,31 @@
       </p:grpSpPr>
       <p:pic>
         <p:nvPicPr>
-          <p:cNvPr id="11" name="Logo (background)"/>
+          <p:cNvPr id="11" name="Art (title-light)"/>
+          <p:cNvPicPr>
+            <a:picLocks noChangeAspect="1"/>
+          </p:cNvPicPr>
+          <p:nvPr userDrawn="1"/>
+        </p:nvPicPr>
+        <p:blipFill>
+          <a:blip r:embed="rId4"/>
+          <a:stretch>
+            <a:fillRect/>
+          </a:stretch>
+        </p:blipFill>
+        <p:spPr>
+          <a:xfrm>
+            <a:off x="0" y="0"/>
+            <a:ext cx="12192000" cy="6858000"/>
+          </a:xfrm>
+          <a:prstGeom prst="rect">
+            <a:avLst/>
+          </a:prstGeom>
+        </p:spPr>
+      </p:pic>
+      <p:pic>
+        <p:nvPicPr>
+          <p:cNvPr id="12" name="Logo (background)"/>
           <p:cNvPicPr>
             <a:picLocks noChangeAspect="1"/>
           </p:cNvPicPr>
@@ -2381,7 +2405,7 @@
       </p:pic>
       <p:pic>
         <p:nvPicPr>
-          <p:cNvPr id="12" name="Sign-off (background)"/>
+          <p:cNvPr id="13" name="Sign-off (background)"/>
           <p:cNvPicPr>
             <a:picLocks noChangeAspect="1"/>
           </p:cNvPicPr>
@@ -2405,7 +2429,7 @@
       </p:pic>
       <p:sp>
         <p:nvSpPr>
-          <p:cNvPr id="13" name="Date"/>
+          <p:cNvPr id="14" name="Date"/>
           <p:cNvSpPr>
             <a:spLocks noGrp="1"/>
           </p:cNvSpPr>
@@ -2434,7 +2458,7 @@
               <a:buNone/>
               <a:defRPr sz="1600" b="1" cap="all">
                 <a:solidFill>
-                  <a:srgbClr val="FFFFFF"/>
+                  <a:srgbClr val="000000"/>
                 </a:solidFill>
                 <a:latin typeface="+mn-lt"/>
               </a:defRPr>
@@ -2450,7 +2474,7 @@
       </p:sp>
       <p:sp>
         <p:nvSpPr>
-          <p:cNvPr id="14" name="Title"/>
+          <p:cNvPr id="15" name="Title"/>
           <p:cNvSpPr>
             <a:spLocks noGrp="1"/>
           </p:cNvSpPr>
@@ -2479,7 +2503,7 @@
               <a:buNone/>
               <a:defRPr sz="3600" b="1">
                 <a:solidFill>
-                  <a:srgbClr val="FFFFFF"/>
+                  <a:srgbClr val="000000"/>
                 </a:solidFill>
                 <a:latin typeface="+mn-lt"/>
               </a:defRPr>
@@ -2495,7 +2519,7 @@
       </p:sp>
       <p:sp>
         <p:nvSpPr>
-          <p:cNvPr id="15" name="Subtitle"/>
+          <p:cNvPr id="16" name="Subtitle"/>
           <p:cNvSpPr>
             <a:spLocks noGrp="1"/>
           </p:cNvSpPr>
@@ -2524,7 +2548,7 @@
               <a:buNone/>
               <a:defRPr sz="2000" b="0">
                 <a:solidFill>
-                  <a:srgbClr val="FFFFFF"/>
+                  <a:srgbClr val="000000"/>
                 </a:solidFill>
                 <a:latin typeface="+mn-lt"/>
               </a:defRPr>
@@ -2540,7 +2564,7 @@
       </p:sp>
       <p:sp>
         <p:nvSpPr>
-          <p:cNvPr id="16" name="Slide Number Placeholder"/>
+          <p:cNvPr id="17" name="Slide Number Placeholder"/>
           <p:cNvSpPr>
             <a:spLocks noGrp="1"/>
           </p:cNvSpPr>
@@ -2560,7 +2584,7 @@
             <a:lvl1pPr algn="ctr">
               <a:defRPr sz="1200" b="1">
                 <a:solidFill>
-                  <a:srgbClr val="FFFFFF"/>
+                  <a:srgbClr val="000000"/>
                 </a:solidFill>
               </a:defRPr>
             </a:lvl1pPr>
@@ -2575,7 +2599,7 @@
       </p:sp>
       <p:sp>
         <p:nvSpPr>
-          <p:cNvPr id="18" name="Footer Placeholder"/>
+          <p:cNvPr id="19" name="Footer Placeholder"/>
           <p:cNvSpPr>
             <a:spLocks noGrp="1"/>
           </p:cNvSpPr>
@@ -2598,7 +2622,7 @@
             <a:lvl1pPr algn="l">
               <a:defRPr sz="1200">
                 <a:solidFill>
-                  <a:srgbClr val="FFFFFF"/>
+                  <a:srgbClr val="000000"/>
                 </a:solidFill>
               </a:defRPr>
             </a:lvl1pPr>

--- a/liveries/nasa-jsc-eg/template.pptx
+++ b/liveries/nasa-jsc-eg/template.pptx
@@ -816,7 +816,7 @@
     <p:bg>
       <p:bgPr>
         <a:solidFill>
-          <a:schemeClr val="bg2"/>
+          <a:schemeClr val="accent3"/>
         </a:solidFill>
         <a:effectLst/>
       </p:bgPr>
@@ -861,7 +861,7 @@
       </p:pic>
       <p:pic>
         <p:nvPicPr>
-          <p:cNvPr id="12" name="Logo (surface)"/>
+          <p:cNvPr id="12" name="Logo (dark)"/>
           <p:cNvPicPr>
             <a:picLocks noChangeAspect="1"/>
           </p:cNvPicPr>
@@ -885,7 +885,7 @@
       </p:pic>
       <p:pic>
         <p:nvPicPr>
-          <p:cNvPr id="13" name="Sign-off (surface)"/>
+          <p:cNvPr id="13" name="Sign-off (dark)"/>
           <p:cNvPicPr>
             <a:picLocks noChangeAspect="1"/>
           </p:cNvPicPr>
@@ -2022,7 +2022,7 @@
     <p:bg>
       <p:bgPr>
         <a:solidFill>
-          <a:schemeClr val="bg2"/>
+          <a:schemeClr val="accent3"/>
         </a:solidFill>
         <a:effectLst/>
       </p:bgPr>
@@ -2067,7 +2067,7 @@
       </p:pic>
       <p:pic>
         <p:nvPicPr>
-          <p:cNvPr id="12" name="Logo (surface)"/>
+          <p:cNvPr id="12" name="Logo (dark)"/>
           <p:cNvPicPr>
             <a:picLocks noChangeAspect="1"/>
           </p:cNvPicPr>
@@ -2091,7 +2091,7 @@
       </p:pic>
       <p:pic>
         <p:nvPicPr>
-          <p:cNvPr id="13" name="Sign-off (surface)"/>
+          <p:cNvPr id="13" name="Sign-off (dark)"/>
           <p:cNvPicPr>
             <a:picLocks noChangeAspect="1"/>
           </p:cNvPicPr>
@@ -2357,7 +2357,31 @@
       </p:grpSpPr>
       <p:pic>
         <p:nvPicPr>
-          <p:cNvPr id="11" name="Logo (background)"/>
+          <p:cNvPr id="11" name="Art (title-light)"/>
+          <p:cNvPicPr>
+            <a:picLocks noChangeAspect="1"/>
+          </p:cNvPicPr>
+          <p:nvPr userDrawn="1"/>
+        </p:nvPicPr>
+        <p:blipFill>
+          <a:blip r:embed="rId4"/>
+          <a:stretch>
+            <a:fillRect/>
+          </a:stretch>
+        </p:blipFill>
+        <p:spPr>
+          <a:xfrm>
+            <a:off x="0" y="0"/>
+            <a:ext cx="12192000" cy="6858000"/>
+          </a:xfrm>
+          <a:prstGeom prst="rect">
+            <a:avLst/>
+          </a:prstGeom>
+        </p:spPr>
+      </p:pic>
+      <p:pic>
+        <p:nvPicPr>
+          <p:cNvPr id="12" name="Logo (background)"/>
           <p:cNvPicPr>
             <a:picLocks noChangeAspect="1"/>
           </p:cNvPicPr>
@@ -2381,7 +2405,7 @@
       </p:pic>
       <p:pic>
         <p:nvPicPr>
-          <p:cNvPr id="12" name="Sign-off (background)"/>
+          <p:cNvPr id="13" name="Sign-off (background)"/>
           <p:cNvPicPr>
             <a:picLocks noChangeAspect="1"/>
           </p:cNvPicPr>
@@ -2405,7 +2429,7 @@
       </p:pic>
       <p:sp>
         <p:nvSpPr>
-          <p:cNvPr id="13" name="Date"/>
+          <p:cNvPr id="14" name="Date"/>
           <p:cNvSpPr>
             <a:spLocks noGrp="1"/>
           </p:cNvSpPr>
@@ -2434,7 +2458,7 @@
               <a:buNone/>
               <a:defRPr sz="1600" b="1" cap="all">
                 <a:solidFill>
-                  <a:srgbClr val="FFFFFF"/>
+                  <a:srgbClr val="000000"/>
                 </a:solidFill>
                 <a:latin typeface="+mn-lt"/>
               </a:defRPr>
@@ -2450,7 +2474,7 @@
       </p:sp>
       <p:sp>
         <p:nvSpPr>
-          <p:cNvPr id="14" name="Title"/>
+          <p:cNvPr id="15" name="Title"/>
           <p:cNvSpPr>
             <a:spLocks noGrp="1"/>
           </p:cNvSpPr>
@@ -2479,7 +2503,7 @@
               <a:buNone/>
               <a:defRPr sz="3600" b="1">
                 <a:solidFill>
-                  <a:srgbClr val="FFFFFF"/>
+                  <a:srgbClr val="000000"/>
                 </a:solidFill>
                 <a:latin typeface="+mn-lt"/>
               </a:defRPr>
@@ -2495,7 +2519,7 @@
       </p:sp>
       <p:sp>
         <p:nvSpPr>
-          <p:cNvPr id="15" name="Subtitle"/>
+          <p:cNvPr id="16" name="Subtitle"/>
           <p:cNvSpPr>
             <a:spLocks noGrp="1"/>
           </p:cNvSpPr>
@@ -2524,7 +2548,7 @@
               <a:buNone/>
               <a:defRPr sz="2000" b="0">
                 <a:solidFill>
-                  <a:srgbClr val="FFFFFF"/>
+                  <a:srgbClr val="000000"/>
                 </a:solidFill>
                 <a:latin typeface="+mn-lt"/>
               </a:defRPr>
@@ -2540,7 +2564,7 @@
       </p:sp>
       <p:sp>
         <p:nvSpPr>
-          <p:cNvPr id="16" name="Slide Number Placeholder"/>
+          <p:cNvPr id="17" name="Slide Number Placeholder"/>
           <p:cNvSpPr>
             <a:spLocks noGrp="1"/>
           </p:cNvSpPr>
@@ -2560,7 +2584,7 @@
             <a:lvl1pPr algn="ctr">
               <a:defRPr sz="1200" b="1">
                 <a:solidFill>
-                  <a:srgbClr val="FFFFFF"/>
+                  <a:srgbClr val="000000"/>
                 </a:solidFill>
               </a:defRPr>
             </a:lvl1pPr>
@@ -2575,7 +2599,7 @@
       </p:sp>
       <p:sp>
         <p:nvSpPr>
-          <p:cNvPr id="18" name="Footer Placeholder"/>
+          <p:cNvPr id="19" name="Footer Placeholder"/>
           <p:cNvSpPr>
             <a:spLocks noGrp="1"/>
           </p:cNvSpPr>
@@ -2598,7 +2622,7 @@
             <a:lvl1pPr algn="l">
               <a:defRPr sz="1200">
                 <a:solidFill>
-                  <a:srgbClr val="FFFFFF"/>
+                  <a:srgbClr val="000000"/>
                 </a:solidFill>
               </a:defRPr>
             </a:lvl1pPr>
@@ -2952,8 +2976,11 @@
         <a:spcBef>
           <a:spcPts val="800"/>
         </a:spcBef>
+        <a:buClr>
+          <a:srgbClr val="FFFFFF"/>
+        </a:buClr>
         <a:buFont typeface="Arial"/>
-        <a:buChar char="•"/>
+        <a:buChar char="▪"/>
         <a:defRPr sz="1600" kern="1200">
           <a:solidFill>
             <a:schemeClr val="tx1"/>
@@ -2970,8 +2997,11 @@
         <a:spcBef>
           <a:spcPts val="480"/>
         </a:spcBef>
-        <a:buFont typeface="Wingdings"/>
-        <a:buChar char="§"/>
+        <a:buClr>
+          <a:srgbClr val="FFFFFF"/>
+        </a:buClr>
+        <a:buFont typeface="Arial"/>
+        <a:buChar char="–"/>
         <a:defRPr sz="1500" kern="1200">
           <a:solidFill>
             <a:schemeClr val="tx1"/>
@@ -2988,8 +3018,11 @@
         <a:spcBef>
           <a:spcPts val="480"/>
         </a:spcBef>
-        <a:buFont typeface="Courier New"/>
-        <a:buChar char="o"/>
+        <a:buClr>
+          <a:srgbClr val="FFFFFF"/>
+        </a:buClr>
+        <a:buFont typeface="Arial"/>
+        <a:buChar char="•"/>
         <a:defRPr sz="1300" kern="1200">
           <a:solidFill>
             <a:schemeClr val="tx1"/>
@@ -3006,8 +3039,11 @@
         <a:spcBef>
           <a:spcPts val="480"/>
         </a:spcBef>
+        <a:buClr>
+          <a:srgbClr val="FFFFFF"/>
+        </a:buClr>
         <a:buFont typeface="Arial"/>
-        <a:buChar char="–"/>
+        <a:buChar char="•"/>
         <a:defRPr sz="1200" kern="1200">
           <a:solidFill>
             <a:schemeClr val="tx1"/>
@@ -3024,8 +3060,11 @@
         <a:spcBef>
           <a:spcPts val="480"/>
         </a:spcBef>
+        <a:buClr>
+          <a:srgbClr val="FFFFFF"/>
+        </a:buClr>
         <a:buFont typeface="Arial"/>
-        <a:buChar char="»"/>
+        <a:buChar char="•"/>
         <a:defRPr sz="1100" kern="1200">
           <a:solidFill>
             <a:schemeClr val="tx1"/>

--- a/liveries/nasa-jsc-eg/template.pptx
+++ b/liveries/nasa-jsc-eg/template.pptx
@@ -673,8 +673,8 @@
         </p:nvSpPr>
         <p:spPr>
           <a:xfrm>
-            <a:off x="341376" y="1270102"/>
-            <a:ext cx="11509248" cy="5054346"/>
+            <a:off x="341376" y="1270787"/>
+            <a:ext cx="11509248" cy="5053660"/>
           </a:xfrm>
           <a:prstGeom prst="rect">
             <a:avLst/>
@@ -1170,8 +1170,8 @@
         </p:nvSpPr>
         <p:spPr>
           <a:xfrm>
-            <a:off x="341376" y="1270102"/>
-            <a:ext cx="5571744" cy="5054346"/>
+            <a:off x="341376" y="1270787"/>
+            <a:ext cx="5571744" cy="5053660"/>
           </a:xfrm>
           <a:prstGeom prst="rect">
             <a:avLst/>
@@ -1200,8 +1200,8 @@
         </p:nvSpPr>
         <p:spPr>
           <a:xfrm>
-            <a:off x="6278880" y="1270102"/>
-            <a:ext cx="5571744" cy="5054346"/>
+            <a:off x="6278880" y="1270787"/>
+            <a:ext cx="5571744" cy="5053660"/>
           </a:xfrm>
           <a:prstGeom prst="rect">
             <a:avLst/>
@@ -1392,7 +1392,7 @@
         </p:nvSpPr>
         <p:spPr>
           <a:xfrm>
-            <a:off x="341376" y="1270102"/>
+            <a:off x="341376" y="1270787"/>
             <a:ext cx="5571744" cy="617220"/>
           </a:xfrm>
           <a:prstGeom prst="rect">
@@ -1433,8 +1433,8 @@
         </p:nvSpPr>
         <p:spPr>
           <a:xfrm>
-            <a:off x="341376" y="1955902"/>
-            <a:ext cx="5571744" cy="4368546"/>
+            <a:off x="341376" y="1956587"/>
+            <a:ext cx="5571744" cy="4367860"/>
           </a:xfrm>
           <a:prstGeom prst="rect">
             <a:avLst/>
@@ -1463,7 +1463,7 @@
         </p:nvSpPr>
         <p:spPr>
           <a:xfrm>
-            <a:off x="6278880" y="1270102"/>
+            <a:off x="6278880" y="1270787"/>
             <a:ext cx="5571744" cy="617220"/>
           </a:xfrm>
           <a:prstGeom prst="rect">
@@ -1504,8 +1504,8 @@
         </p:nvSpPr>
         <p:spPr>
           <a:xfrm>
-            <a:off x="6278880" y="1955902"/>
-            <a:ext cx="5571744" cy="4368546"/>
+            <a:off x="6278880" y="1956587"/>
+            <a:ext cx="5571744" cy="4367860"/>
           </a:xfrm>
           <a:prstGeom prst="rect">
             <a:avLst/>
@@ -1670,7 +1670,7 @@
         </p:nvSpPr>
         <p:spPr>
           <a:xfrm>
-            <a:off x="341376" y="1270102"/>
+            <a:off x="341376" y="1270787"/>
             <a:ext cx="4023360" cy="891540"/>
           </a:xfrm>
           <a:prstGeom prst="rect">
@@ -1706,8 +1706,8 @@
         </p:nvSpPr>
         <p:spPr>
           <a:xfrm>
-            <a:off x="4730496" y="1270102"/>
-            <a:ext cx="7120128" cy="5054346"/>
+            <a:off x="4730496" y="1270787"/>
+            <a:ext cx="7120128" cy="5053660"/>
           </a:xfrm>
           <a:prstGeom prst="rect">
             <a:avLst/>
@@ -1736,8 +1736,8 @@
         </p:nvSpPr>
         <p:spPr>
           <a:xfrm>
-            <a:off x="341376" y="2230222"/>
-            <a:ext cx="4023360" cy="4094226"/>
+            <a:off x="341376" y="2230907"/>
+            <a:ext cx="4023360" cy="4093540"/>
           </a:xfrm>
           <a:prstGeom prst="rect">
             <a:avLst/>
@@ -2724,8 +2724,8 @@
         </p:nvSpPr>
         <p:spPr>
           <a:xfrm>
-            <a:off x="341376" y="336042"/>
-            <a:ext cx="10300601" cy="654253"/>
+            <a:off x="341376" y="335356"/>
+            <a:ext cx="10300601" cy="533552"/>
           </a:xfrm>
           <a:prstGeom prst="rect">
             <a:avLst/>
@@ -2756,8 +2756,8 @@
         </p:nvSpPr>
         <p:spPr>
           <a:xfrm>
-            <a:off x="341376" y="1270102"/>
-            <a:ext cx="11509248" cy="5054346"/>
+            <a:off x="341376" y="1270787"/>
+            <a:ext cx="11509248" cy="5053660"/>
           </a:xfrm>
           <a:prstGeom prst="rect">
             <a:avLst/>

--- a/liveries/nasa-jsc-eg/template.pptx
+++ b/liveries/nasa-jsc-eg/template.pptx
@@ -2703,11 +2703,9 @@
           <a:prstGeom prst="line">
             <a:avLst/>
           </a:prstGeom>
-          <a:ln w="9525">
+          <a:ln w="10973">
             <a:solidFill>
-              <a:schemeClr val="tx1">
-                <a:alpha val="30000"/>
-              </a:schemeClr>
+              <a:srgbClr val="E1E1E1"/>
             </a:solidFill>
           </a:ln>
         </p:spPr>

--- a/liveries/nasa-jsc-eg/template.pptx
+++ b/liveries/nasa-jsc-eg/template.pptx
@@ -141,7 +141,7 @@
                 <a:spcPts val="0"/>
               </a:spcBef>
               <a:buNone/>
-              <a:defRPr sz="1600" b="1" cap="all">
+              <a:defRPr sz="1600" b="1" cap="all" spc="128">
                 <a:solidFill>
                   <a:srgbClr val="000000"/>
                 </a:solidFill>
@@ -2456,7 +2456,7 @@
                 <a:spcPts val="0"/>
               </a:spcBef>
               <a:buNone/>
-              <a:defRPr sz="1600" b="1" cap="all">
+              <a:defRPr sz="1600" b="1" cap="all" spc="128">
                 <a:solidFill>
                   <a:srgbClr val="000000"/>
                 </a:solidFill>

--- a/liveries/nasa-jsc-eg/template.pptx
+++ b/liveries/nasa-jsc-eg/template.pptx
@@ -141,7 +141,7 @@
                 <a:spcPts val="0"/>
               </a:spcBef>
               <a:buNone/>
-              <a:defRPr sz="1600" b="1" cap="all">
+              <a:defRPr sz="1600" b="1" cap="all" spc="128">
                 <a:solidFill>
                   <a:srgbClr val="000000"/>
                 </a:solidFill>
@@ -673,8 +673,8 @@
         </p:nvSpPr>
         <p:spPr>
           <a:xfrm>
-            <a:off x="341376" y="1270102"/>
-            <a:ext cx="11509248" cy="5054346"/>
+            <a:off x="341376" y="1270787"/>
+            <a:ext cx="11509248" cy="5053660"/>
           </a:xfrm>
           <a:prstGeom prst="rect">
             <a:avLst/>
@@ -1170,8 +1170,8 @@
         </p:nvSpPr>
         <p:spPr>
           <a:xfrm>
-            <a:off x="341376" y="1270102"/>
-            <a:ext cx="5571744" cy="5054346"/>
+            <a:off x="341376" y="1270787"/>
+            <a:ext cx="5571744" cy="5053660"/>
           </a:xfrm>
           <a:prstGeom prst="rect">
             <a:avLst/>
@@ -1200,8 +1200,8 @@
         </p:nvSpPr>
         <p:spPr>
           <a:xfrm>
-            <a:off x="6278880" y="1270102"/>
-            <a:ext cx="5571744" cy="5054346"/>
+            <a:off x="6278880" y="1270787"/>
+            <a:ext cx="5571744" cy="5053660"/>
           </a:xfrm>
           <a:prstGeom prst="rect">
             <a:avLst/>
@@ -1392,7 +1392,7 @@
         </p:nvSpPr>
         <p:spPr>
           <a:xfrm>
-            <a:off x="341376" y="1270102"/>
+            <a:off x="341376" y="1270787"/>
             <a:ext cx="5571744" cy="617220"/>
           </a:xfrm>
           <a:prstGeom prst="rect">
@@ -1433,8 +1433,8 @@
         </p:nvSpPr>
         <p:spPr>
           <a:xfrm>
-            <a:off x="341376" y="1955902"/>
-            <a:ext cx="5571744" cy="4368546"/>
+            <a:off x="341376" y="1956587"/>
+            <a:ext cx="5571744" cy="4367860"/>
           </a:xfrm>
           <a:prstGeom prst="rect">
             <a:avLst/>
@@ -1463,7 +1463,7 @@
         </p:nvSpPr>
         <p:spPr>
           <a:xfrm>
-            <a:off x="6278880" y="1270102"/>
+            <a:off x="6278880" y="1270787"/>
             <a:ext cx="5571744" cy="617220"/>
           </a:xfrm>
           <a:prstGeom prst="rect">
@@ -1504,8 +1504,8 @@
         </p:nvSpPr>
         <p:spPr>
           <a:xfrm>
-            <a:off x="6278880" y="1955902"/>
-            <a:ext cx="5571744" cy="4368546"/>
+            <a:off x="6278880" y="1956587"/>
+            <a:ext cx="5571744" cy="4367860"/>
           </a:xfrm>
           <a:prstGeom prst="rect">
             <a:avLst/>
@@ -1670,7 +1670,7 @@
         </p:nvSpPr>
         <p:spPr>
           <a:xfrm>
-            <a:off x="341376" y="1270102"/>
+            <a:off x="341376" y="1270787"/>
             <a:ext cx="4023360" cy="891540"/>
           </a:xfrm>
           <a:prstGeom prst="rect">
@@ -1706,8 +1706,8 @@
         </p:nvSpPr>
         <p:spPr>
           <a:xfrm>
-            <a:off x="4730496" y="1270102"/>
-            <a:ext cx="7120128" cy="5054346"/>
+            <a:off x="4730496" y="1270787"/>
+            <a:ext cx="7120128" cy="5053660"/>
           </a:xfrm>
           <a:prstGeom prst="rect">
             <a:avLst/>
@@ -1736,8 +1736,8 @@
         </p:nvSpPr>
         <p:spPr>
           <a:xfrm>
-            <a:off x="341376" y="2230222"/>
-            <a:ext cx="4023360" cy="4094226"/>
+            <a:off x="341376" y="2230907"/>
+            <a:ext cx="4023360" cy="4093540"/>
           </a:xfrm>
           <a:prstGeom prst="rect">
             <a:avLst/>
@@ -2456,7 +2456,7 @@
                 <a:spcPts val="0"/>
               </a:spcBef>
               <a:buNone/>
-              <a:defRPr sz="1600" b="1" cap="all">
+              <a:defRPr sz="1600" b="1" cap="all" spc="128">
                 <a:solidFill>
                   <a:srgbClr val="000000"/>
                 </a:solidFill>
@@ -2703,11 +2703,9 @@
           <a:prstGeom prst="line">
             <a:avLst/>
           </a:prstGeom>
-          <a:ln w="9525">
+          <a:ln w="10973">
             <a:solidFill>
-              <a:schemeClr val="tx1">
-                <a:alpha val="30000"/>
-              </a:schemeClr>
+              <a:srgbClr val="E1E1E1"/>
             </a:solidFill>
           </a:ln>
         </p:spPr>
@@ -2724,8 +2722,8 @@
         </p:nvSpPr>
         <p:spPr>
           <a:xfrm>
-            <a:off x="341376" y="336042"/>
-            <a:ext cx="10300601" cy="654253"/>
+            <a:off x="341376" y="335356"/>
+            <a:ext cx="10300601" cy="533552"/>
           </a:xfrm>
           <a:prstGeom prst="rect">
             <a:avLst/>
@@ -2756,8 +2754,8 @@
         </p:nvSpPr>
         <p:spPr>
           <a:xfrm>
-            <a:off x="341376" y="1270102"/>
-            <a:ext cx="11509248" cy="5054346"/>
+            <a:off x="341376" y="1270787"/>
+            <a:ext cx="11509248" cy="5053660"/>
           </a:xfrm>
           <a:prstGeom prst="rect">
             <a:avLst/>
